--- a/Slides/Semana 5/semana_5_slides.pptx
+++ b/Slides/Semana 5/semana_5_slides.pptx
@@ -974,7 +974,7 @@
 - "Que problema real esse projeto resolve, e para quem?"
 - "Nosso público-alvo ainda é 'a comunidade', ou já conseguimos ser específicos?"
 Avaliação nesta semana: acompanhamento inicial (sem nota) de Planejamento — clareza, especificidade e viabilidade dos objetivos, qualidade da justificativa, delimitação do público-alvo — e Gestão do Projeto — capacidade de relatar progresso e próximos passos no checkpoint, conforme Rubrica de Avaliação. Alimenta a avaliação de Planejamento prevista para a entrega do Plano Completo (Semana 7).
-Fonte: Plano Semanal Semana 5, Cronograma, CLAUDE.md, COURSE_CONTEXT.md, PEDAGOGICAL_RULES.md, EXTENSION_PROJECT_GUIDE.md.</a:t>
+Fonte: Plano Semanal Semana 5, Cronograma.</a:t>
             </a:r>
             <a:endParaRPr lang="en-US" dirty="0"/>
           </a:p>
